--- a/Smart Parking System presentation.pptx
+++ b/Smart Parking System presentation.pptx
@@ -2653,7 +2653,6 @@
               <a:rPr lang="en-US" sz="1400" dirty="0"/>
               <a:t>Place the Inputs</a:t>
             </a:r>
-            <a:endParaRPr lang="en-US" sz="1400" dirty="0"/>
           </a:p>
         </p:txBody>
       </p:sp>
@@ -2864,7 +2863,6 @@
               <a:rPr lang="en-US" sz="1400" dirty="0"/>
               <a:t>Add the Logic Gates</a:t>
             </a:r>
-            <a:endParaRPr lang="en-US" sz="1400" dirty="0"/>
           </a:p>
         </p:txBody>
       </p:sp>
@@ -4140,9 +4138,6 @@
           <a:bodyPr wrap="square" lIns="0" tIns="0" rIns="0" bIns="0" rtlCol="0" anchor="ctr"/>
           <a:lstStyle/>
           <a:p>
-            <a:pPr marL="0" indent="0">
-              <a:buNone/>
-            </a:pPr>
             <a:r>
               <a:rPr lang="en-US" sz="1100" dirty="0">
                 <a:solidFill>
@@ -4152,7 +4147,7 @@
                 <a:ea typeface="Courier New" pitchFamily="34" charset="-122"/>
                 <a:cs typeface="Courier New" pitchFamily="34" charset="-120"/>
               </a:rPr>
-              <a:t>|-- circuits/        Logisim .circ files</a:t>
+              <a:t>|-- KLH-FED-2026-Session-10-Batch-10</a:t>
             </a:r>
             <a:endParaRPr lang="en-US" sz="1100" dirty="0"/>
           </a:p>
@@ -4179,9 +4174,6 @@
           <a:bodyPr wrap="square" lIns="0" tIns="0" rIns="0" bIns="0" rtlCol="0" anchor="ctr"/>
           <a:lstStyle/>
           <a:p>
-            <a:pPr marL="0" indent="0">
-              <a:buNone/>
-            </a:pPr>
             <a:r>
               <a:rPr lang="en-US" sz="1100" dirty="0">
                 <a:solidFill>
@@ -4191,36 +4183,8 @@
                 <a:ea typeface="Courier New" pitchFamily="34" charset="-122"/>
                 <a:cs typeface="Courier New" pitchFamily="34" charset="-120"/>
               </a:rPr>
-              <a:t>|    |-- occupancy_detector.circ</a:t>
-            </a:r>
-            <a:endParaRPr lang="en-US" sz="1100" dirty="0"/>
-          </a:p>
-        </p:txBody>
-      </p:sp>
-      <p:sp>
-        <p:nvSpPr>
-          <p:cNvPr id="9" name="Text 7"/>
-          <p:cNvSpPr txBox="1"/>
-          <p:nvPr/>
-        </p:nvSpPr>
-        <p:spPr>
-          <a:xfrm>
-            <a:off x="822960" y="2889504"/>
-            <a:ext cx="5120640" cy="274320"/>
-          </a:xfrm>
-          <a:prstGeom prst="rect">
-            <a:avLst/>
-          </a:prstGeom>
-          <a:noFill/>
-          <a:ln/>
-        </p:spPr>
-        <p:txBody>
-          <a:bodyPr wrap="square" lIns="0" tIns="0" rIns="0" bIns="0" rtlCol="0" anchor="ctr"/>
-          <a:lstStyle/>
-          <a:p>
-            <a:pPr marL="0" indent="0">
-              <a:buNone/>
-            </a:pPr>
+              <a:t>|    </a:t>
+            </a:r>
             <a:r>
               <a:rPr lang="en-US" sz="1100" dirty="0">
                 <a:solidFill>
@@ -4230,38 +4194,10 @@
                 <a:ea typeface="Courier New" pitchFamily="34" charset="-122"/>
                 <a:cs typeface="Courier New" pitchFamily="34" charset="-120"/>
               </a:rPr>
-              <a:t>|    |-- priority_encoder.circ</a:t>
-            </a:r>
-            <a:endParaRPr lang="en-US" sz="1100" dirty="0"/>
-          </a:p>
-        </p:txBody>
-      </p:sp>
-      <p:sp>
-        <p:nvSpPr>
-          <p:cNvPr id="10" name="Text 8"/>
-          <p:cNvSpPr txBox="1"/>
-          <p:nvPr/>
-        </p:nvSpPr>
-        <p:spPr>
-          <a:xfrm>
-            <a:off x="822960" y="3191256"/>
-            <a:ext cx="5120640" cy="274320"/>
-          </a:xfrm>
-          <a:prstGeom prst="rect">
-            <a:avLst/>
-          </a:prstGeom>
-          <a:noFill/>
-          <a:ln/>
-        </p:spPr>
-        <p:txBody>
-          <a:bodyPr wrap="square" lIns="0" tIns="0" rIns="0" bIns="0" rtlCol="0" anchor="ctr"/>
-          <a:lstStyle/>
-          <a:p>
-            <a:pPr marL="0" indent="0">
-              <a:buNone/>
-            </a:pPr>
-            <a:r>
-              <a:rPr lang="en-US" sz="1100" dirty="0">
+              <a:t>|-- </a:t>
+            </a:r>
+            <a:r>
+              <a:rPr lang="en-US" sz="1100" dirty="0" smtClean="0">
                 <a:solidFill>
                   <a:srgbClr val="FFFFFF"/>
                 </a:solidFill>
@@ -4269,7 +4205,7 @@
                 <a:ea typeface="Courier New" pitchFamily="34" charset="-122"/>
                 <a:cs typeface="Courier New" pitchFamily="34" charset="-120"/>
               </a:rPr>
-              <a:t>|    `-- full_system.circ</a:t>
+              <a:t>readme.md</a:t>
             </a:r>
             <a:endParaRPr lang="en-US" sz="1100" dirty="0"/>
           </a:p>
@@ -4277,13 +4213,13 @@
       </p:sp>
       <p:sp>
         <p:nvSpPr>
-          <p:cNvPr id="11" name="Text 9"/>
-          <p:cNvSpPr txBox="1"/>
-          <p:nvPr/>
-        </p:nvSpPr>
-        <p:spPr>
-          <a:xfrm>
-            <a:off x="822960" y="3493008"/>
+          <p:cNvPr id="9" name="Text 7"/>
+          <p:cNvSpPr txBox="1"/>
+          <p:nvPr/>
+        </p:nvSpPr>
+        <p:spPr>
+          <a:xfrm>
+            <a:off x="822960" y="2889504"/>
             <a:ext cx="5120640" cy="274320"/>
           </a:xfrm>
           <a:prstGeom prst="rect">
@@ -4296,9 +4232,6 @@
           <a:bodyPr wrap="square" lIns="0" tIns="0" rIns="0" bIns="0" rtlCol="0" anchor="ctr"/>
           <a:lstStyle/>
           <a:p>
-            <a:pPr marL="0" indent="0">
-              <a:buNone/>
-            </a:pPr>
             <a:r>
               <a:rPr lang="en-US" sz="1100" dirty="0">
                 <a:solidFill>
@@ -4308,36 +4241,8 @@
                 <a:ea typeface="Courier New" pitchFamily="34" charset="-122"/>
                 <a:cs typeface="Courier New" pitchFamily="34" charset="-120"/>
               </a:rPr>
-              <a:t>|-- docs/             Truth tables &amp; K-maps</a:t>
-            </a:r>
-            <a:endParaRPr lang="en-US" sz="1100" dirty="0"/>
-          </a:p>
-        </p:txBody>
-      </p:sp>
-      <p:sp>
-        <p:nvSpPr>
-          <p:cNvPr id="12" name="Text 10"/>
-          <p:cNvSpPr txBox="1"/>
-          <p:nvPr/>
-        </p:nvSpPr>
-        <p:spPr>
-          <a:xfrm>
-            <a:off x="822960" y="3794760"/>
-            <a:ext cx="5120640" cy="274320"/>
-          </a:xfrm>
-          <a:prstGeom prst="rect">
-            <a:avLst/>
-          </a:prstGeom>
-          <a:noFill/>
-          <a:ln/>
-        </p:spPr>
-        <p:txBody>
-          <a:bodyPr wrap="square" lIns="0" tIns="0" rIns="0" bIns="0" rtlCol="0" anchor="ctr"/>
-          <a:lstStyle/>
-          <a:p>
-            <a:pPr marL="0" indent="0">
-              <a:buNone/>
-            </a:pPr>
+              <a:t>|    </a:t>
+            </a:r>
             <a:r>
               <a:rPr lang="en-US" sz="1100" dirty="0">
                 <a:solidFill>
@@ -4347,7 +4252,7 @@
                 <a:ea typeface="Courier New" pitchFamily="34" charset="-122"/>
                 <a:cs typeface="Courier New" pitchFamily="34" charset="-120"/>
               </a:rPr>
-              <a:t>|-- screenshots/  Simulation demo captures</a:t>
+              <a:t>|-- Smart Parking System presentation.pptx</a:t>
             </a:r>
             <a:endParaRPr lang="en-US" sz="1100" dirty="0"/>
           </a:p>
@@ -4355,13 +4260,13 @@
       </p:sp>
       <p:sp>
         <p:nvSpPr>
-          <p:cNvPr id="13" name="Text 11"/>
-          <p:cNvSpPr txBox="1"/>
-          <p:nvPr/>
-        </p:nvSpPr>
-        <p:spPr>
-          <a:xfrm>
-            <a:off x="822960" y="4096512"/>
+          <p:cNvPr id="10" name="Text 8"/>
+          <p:cNvSpPr txBox="1"/>
+          <p:nvPr/>
+        </p:nvSpPr>
+        <p:spPr>
+          <a:xfrm>
+            <a:off x="822960" y="3191256"/>
             <a:ext cx="5120640" cy="274320"/>
           </a:xfrm>
           <a:prstGeom prst="rect">
@@ -4374,9 +4279,6 @@
           <a:bodyPr wrap="square" lIns="0" tIns="0" rIns="0" bIns="0" rtlCol="0" anchor="ctr"/>
           <a:lstStyle/>
           <a:p>
-            <a:pPr marL="0" indent="0">
-              <a:buNone/>
-            </a:pPr>
             <a:r>
               <a:rPr lang="en-US" sz="1100" dirty="0">
                 <a:solidFill>
@@ -4386,38 +4288,10 @@
                 <a:ea typeface="Courier New" pitchFamily="34" charset="-122"/>
                 <a:cs typeface="Courier New" pitchFamily="34" charset="-120"/>
               </a:rPr>
-              <a:t>|-- README.md      Setup &amp; usage guide</a:t>
-            </a:r>
-            <a:endParaRPr lang="en-US" sz="1100" dirty="0"/>
-          </a:p>
-        </p:txBody>
-      </p:sp>
-      <p:sp>
-        <p:nvSpPr>
-          <p:cNvPr id="14" name="Text 12"/>
-          <p:cNvSpPr txBox="1"/>
-          <p:nvPr/>
-        </p:nvSpPr>
-        <p:spPr>
-          <a:xfrm>
-            <a:off x="822960" y="4398264"/>
-            <a:ext cx="5120640" cy="274320"/>
-          </a:xfrm>
-          <a:prstGeom prst="rect">
-            <a:avLst/>
-          </a:prstGeom>
-          <a:noFill/>
-          <a:ln/>
-        </p:spPr>
-        <p:txBody>
-          <a:bodyPr wrap="square" lIns="0" tIns="0" rIns="0" bIns="0" rtlCol="0" anchor="ctr"/>
-          <a:lstStyle/>
-          <a:p>
-            <a:pPr marL="0" indent="0">
-              <a:buNone/>
-            </a:pPr>
-            <a:r>
-              <a:rPr lang="en-US" sz="1100" dirty="0">
+              <a:t>|    </a:t>
+            </a:r>
+            <a:r>
+              <a:rPr lang="en-US" sz="1100" dirty="0" smtClean="0">
                 <a:solidFill>
                   <a:srgbClr val="FFFFFF"/>
                 </a:solidFill>
@@ -4425,8 +4299,86 @@
                 <a:ea typeface="Courier New" pitchFamily="34" charset="-122"/>
                 <a:cs typeface="Courier New" pitchFamily="34" charset="-120"/>
               </a:rPr>
-              <a:t>`-- LICENSE</a:t>
-            </a:r>
+              <a:t>|-- </a:t>
+            </a:r>
+            <a:r>
+              <a:rPr lang="en-US" sz="1100" dirty="0">
+                <a:solidFill>
+                  <a:srgbClr val="FFFFFF"/>
+                </a:solidFill>
+                <a:latin typeface="Courier New" pitchFamily="34" charset="0"/>
+                <a:ea typeface="Courier New" pitchFamily="34" charset="-122"/>
+                <a:cs typeface="Courier New" pitchFamily="34" charset="-120"/>
+              </a:rPr>
+              <a:t>Smart Parking </a:t>
+            </a:r>
+            <a:r>
+              <a:rPr lang="en-US" sz="1100" dirty="0" err="1">
+                <a:solidFill>
+                  <a:srgbClr val="FFFFFF"/>
+                </a:solidFill>
+                <a:latin typeface="Courier New" pitchFamily="34" charset="0"/>
+                <a:ea typeface="Courier New" pitchFamily="34" charset="-122"/>
+                <a:cs typeface="Courier New" pitchFamily="34" charset="-120"/>
+              </a:rPr>
+              <a:t>System.circ</a:t>
+            </a:r>
+            <a:endParaRPr lang="en-US" sz="1100" dirty="0"/>
+          </a:p>
+        </p:txBody>
+      </p:sp>
+      <p:sp>
+        <p:nvSpPr>
+          <p:cNvPr id="12" name="Text 10"/>
+          <p:cNvSpPr txBox="1"/>
+          <p:nvPr/>
+        </p:nvSpPr>
+        <p:spPr>
+          <a:xfrm>
+            <a:off x="822960" y="3794760"/>
+            <a:ext cx="5120640" cy="274320"/>
+          </a:xfrm>
+          <a:prstGeom prst="rect">
+            <a:avLst/>
+          </a:prstGeom>
+          <a:noFill/>
+          <a:ln/>
+        </p:spPr>
+        <p:txBody>
+          <a:bodyPr wrap="square" lIns="0" tIns="0" rIns="0" bIns="0" rtlCol="0" anchor="ctr"/>
+          <a:lstStyle/>
+          <a:p>
+            <a:pPr marL="0" indent="0">
+              <a:buNone/>
+            </a:pPr>
+            <a:endParaRPr lang="en-US" sz="1100" dirty="0"/>
+          </a:p>
+        </p:txBody>
+      </p:sp>
+      <p:sp>
+        <p:nvSpPr>
+          <p:cNvPr id="13" name="Text 11"/>
+          <p:cNvSpPr txBox="1"/>
+          <p:nvPr/>
+        </p:nvSpPr>
+        <p:spPr>
+          <a:xfrm>
+            <a:off x="822960" y="4096512"/>
+            <a:ext cx="5120640" cy="274320"/>
+          </a:xfrm>
+          <a:prstGeom prst="rect">
+            <a:avLst/>
+          </a:prstGeom>
+          <a:noFill/>
+          <a:ln/>
+        </p:spPr>
+        <p:txBody>
+          <a:bodyPr wrap="square" lIns="0" tIns="0" rIns="0" bIns="0" rtlCol="0" anchor="ctr"/>
+          <a:lstStyle/>
+          <a:p>
+            <a:pPr marL="0" indent="0">
+              <a:buNone/>
+            </a:pPr>
             <a:endParaRPr lang="en-US" sz="1100" dirty="0"/>
           </a:p>
         </p:txBody>
